--- a/COLLEGRANCE_事業全体像.pptx
+++ b/COLLEGRANCE_事業全体像.pptx
@@ -8727,7 +8727,7 @@
         </p:nvSpPr>
         <p:spPr>
           <a:xfrm>
-            <a:off x="457200" y="4754880"/>
+            <a:off x="457200" y="4572000"/>
             <a:ext cx="10972800" cy="365760"/>
           </a:xfrm>
           <a:prstGeom prst="rect">
@@ -8769,8 +8769,8 @@
         </p:nvSpPr>
         <p:spPr>
           <a:xfrm>
-            <a:off x="457200" y="5212080"/>
-            <a:ext cx="1828800" cy="731520"/>
+            <a:off x="365760" y="5029200"/>
+            <a:ext cx="2011680" cy="640080"/>
           </a:xfrm>
           <a:prstGeom prst="roundRect">
             <a:avLst>
@@ -8809,7 +8809,7 @@
               <a:spcAft>
                 <a:spcPts val="0"/>
               </a:spcAft>
-              <a:defRPr sz="1000" b="0">
+              <a:defRPr sz="900" b="0">
                 <a:solidFill>
                   <a:srgbClr val="1A1A1A"/>
                 </a:solidFill>
@@ -8817,7 +8817,11 @@
               </a:defRPr>
             </a:pPr>
             <a:r>
-              <a:t>空き瓶回収</a:t>
+              <a:t>① 小分け製造時の空き瓶</a:t>
+            </a:r>
+            <a:br/>
+            <a:r>
+              <a:t>（自社ラボで発生）</a:t>
             </a:r>
           </a:p>
         </p:txBody>
@@ -8830,8 +8834,8 @@
         </p:nvSpPr>
         <p:spPr>
           <a:xfrm>
-            <a:off x="2743200" y="5212080"/>
-            <a:ext cx="1828800" cy="731520"/>
+            <a:off x="365760" y="5806440"/>
+            <a:ext cx="2011680" cy="640080"/>
           </a:xfrm>
           <a:prstGeom prst="roundRect">
             <a:avLst>
@@ -8870,7 +8874,7 @@
               <a:spcAft>
                 <a:spcPts val="0"/>
               </a:spcAft>
-              <a:defRPr sz="1000" b="0">
+              <a:defRPr sz="900" b="0">
                 <a:solidFill>
                   <a:srgbClr val="1A1A1A"/>
                 </a:solidFill>
@@ -8878,6 +8882,114 @@
               </a:defRPr>
             </a:pPr>
             <a:r>
+              <a:t>② お客様のフルボトル空き瓶</a:t>
+            </a:r>
+            <a:br/>
+            <a:r>
+              <a:t>（将来の回収事業）</a:t>
+            </a:r>
+          </a:p>
+        </p:txBody>
+      </p:sp>
+      <p:sp>
+        <p:nvSpPr>
+          <p:cNvPr id="19" name="Right Arrow 18"/>
+          <p:cNvSpPr/>
+          <p:nvPr/>
+        </p:nvSpPr>
+        <p:spPr>
+          <a:xfrm>
+            <a:off x="2468880" y="5532120"/>
+            <a:ext cx="365760" cy="228600"/>
+          </a:xfrm>
+          <a:prstGeom prst="rightArrow">
+            <a:avLst/>
+          </a:prstGeom>
+          <a:solidFill>
+            <a:srgbClr val="3A7D44"/>
+          </a:solidFill>
+          <a:ln>
+            <a:noFill/>
+          </a:ln>
+        </p:spPr>
+        <p:style>
+          <a:lnRef idx="1">
+            <a:schemeClr val="accent1"/>
+          </a:lnRef>
+          <a:fillRef idx="3">
+            <a:schemeClr val="accent1"/>
+          </a:fillRef>
+          <a:effectRef idx="2">
+            <a:schemeClr val="accent1"/>
+          </a:effectRef>
+          <a:fontRef idx="minor">
+            <a:schemeClr val="lt1"/>
+          </a:fontRef>
+        </p:style>
+        <p:txBody>
+          <a:bodyPr rtlCol="0" anchor="ctr"/>
+          <a:lstStyle/>
+          <a:p>
+            <a:pPr algn="ctr"/>
+          </a:p>
+        </p:txBody>
+      </p:sp>
+      <p:sp>
+        <p:nvSpPr>
+          <p:cNvPr id="20" name="Rounded Rectangle 19"/>
+          <p:cNvSpPr/>
+          <p:nvPr/>
+        </p:nvSpPr>
+        <p:spPr>
+          <a:xfrm>
+            <a:off x="2926080" y="5212080"/>
+            <a:ext cx="2011680" cy="822960"/>
+          </a:xfrm>
+          <a:prstGeom prst="roundRect">
+            <a:avLst>
+              <a:gd name="adj" fmla="val 5000"/>
+            </a:avLst>
+          </a:prstGeom>
+          <a:solidFill>
+            <a:srgbClr val="3A7D44"/>
+          </a:solidFill>
+          <a:ln>
+            <a:noFill/>
+          </a:ln>
+        </p:spPr>
+        <p:style>
+          <a:lnRef idx="1">
+            <a:schemeClr val="accent1"/>
+          </a:lnRef>
+          <a:fillRef idx="3">
+            <a:schemeClr val="accent1"/>
+          </a:fillRef>
+          <a:effectRef idx="2">
+            <a:schemeClr val="accent1"/>
+          </a:effectRef>
+          <a:fontRef idx="minor">
+            <a:schemeClr val="lt1"/>
+          </a:fontRef>
+        </p:style>
+        <p:txBody>
+          <a:bodyPr rtlCol="0" anchor="ctr" wrap="square"/>
+          <a:lstStyle/>
+          <a:p>
+            <a:pPr algn="ctr">
+              <a:spcBef>
+                <a:spcPts val="0"/>
+              </a:spcBef>
+              <a:spcAft>
+                <a:spcPts val="0"/>
+              </a:spcAft>
+              <a:defRPr sz="1100" b="0">
+                <a:solidFill>
+                  <a:srgbClr val="FFFFFF"/>
+                </a:solidFill>
+                <a:latin typeface="Meiryo"/>
+              </a:defRPr>
+            </a:pPr>
+            <a:r>
               <a:t>3Dプリンタ</a:t>
             </a:r>
             <a:br/>
@@ -8889,14 +9001,230 @@
       </p:sp>
       <p:sp>
         <p:nvSpPr>
-          <p:cNvPr id="19" name="Rounded Rectangle 18"/>
+          <p:cNvPr id="21" name="Right Arrow 20"/>
           <p:cNvSpPr/>
           <p:nvPr/>
         </p:nvSpPr>
         <p:spPr>
           <a:xfrm>
-            <a:off x="5303520" y="5212080"/>
-            <a:ext cx="1828800" cy="731520"/>
+            <a:off x="5029200" y="5440680"/>
+            <a:ext cx="365760" cy="228600"/>
+          </a:xfrm>
+          <a:prstGeom prst="rightArrow">
+            <a:avLst/>
+          </a:prstGeom>
+          <a:solidFill>
+            <a:srgbClr val="3A7D44"/>
+          </a:solidFill>
+          <a:ln>
+            <a:noFill/>
+          </a:ln>
+        </p:spPr>
+        <p:style>
+          <a:lnRef idx="1">
+            <a:schemeClr val="accent1"/>
+          </a:lnRef>
+          <a:fillRef idx="3">
+            <a:schemeClr val="accent1"/>
+          </a:fillRef>
+          <a:effectRef idx="2">
+            <a:schemeClr val="accent1"/>
+          </a:effectRef>
+          <a:fontRef idx="minor">
+            <a:schemeClr val="lt1"/>
+          </a:fontRef>
+        </p:style>
+        <p:txBody>
+          <a:bodyPr rtlCol="0" anchor="ctr"/>
+          <a:lstStyle/>
+          <a:p>
+            <a:pPr algn="ctr"/>
+          </a:p>
+        </p:txBody>
+      </p:sp>
+      <p:sp>
+        <p:nvSpPr>
+          <p:cNvPr id="22" name="Rounded Rectangle 21"/>
+          <p:cNvSpPr/>
+          <p:nvPr/>
+        </p:nvSpPr>
+        <p:spPr>
+          <a:xfrm>
+            <a:off x="5486400" y="5029200"/>
+            <a:ext cx="2011680" cy="640080"/>
+          </a:xfrm>
+          <a:prstGeom prst="roundRect">
+            <a:avLst>
+              <a:gd name="adj" fmla="val 5000"/>
+            </a:avLst>
+          </a:prstGeom>
+          <a:solidFill>
+            <a:srgbClr val="1A1A1A"/>
+          </a:solidFill>
+          <a:ln>
+            <a:noFill/>
+          </a:ln>
+        </p:spPr>
+        <p:style>
+          <a:lnRef idx="1">
+            <a:schemeClr val="accent1"/>
+          </a:lnRef>
+          <a:fillRef idx="3">
+            <a:schemeClr val="accent1"/>
+          </a:fillRef>
+          <a:effectRef idx="2">
+            <a:schemeClr val="accent1"/>
+          </a:effectRef>
+          <a:fontRef idx="minor">
+            <a:schemeClr val="lt1"/>
+          </a:fontRef>
+        </p:style>
+        <p:txBody>
+          <a:bodyPr rtlCol="0" anchor="ctr" wrap="square"/>
+          <a:lstStyle/>
+          <a:p>
+            <a:pPr algn="ctr">
+              <a:spcBef>
+                <a:spcPts val="0"/>
+              </a:spcBef>
+              <a:spcAft>
+                <a:spcPts val="0"/>
+              </a:spcAft>
+              <a:defRPr sz="900" b="0">
+                <a:solidFill>
+                  <a:srgbClr val="FFFFFF"/>
+                </a:solidFill>
+                <a:latin typeface="Meiryo"/>
+              </a:defRPr>
+            </a:pPr>
+            <a:r>
+              <a:t>TikTok Shop / 自社EC</a:t>
+            </a:r>
+            <a:br/>
+            <a:r>
+              <a:t>メルカリShopで販売</a:t>
+            </a:r>
+          </a:p>
+        </p:txBody>
+      </p:sp>
+      <p:sp>
+        <p:nvSpPr>
+          <p:cNvPr id="23" name="Rounded Rectangle 22"/>
+          <p:cNvSpPr/>
+          <p:nvPr/>
+        </p:nvSpPr>
+        <p:spPr>
+          <a:xfrm>
+            <a:off x="5486400" y="5806440"/>
+            <a:ext cx="2011680" cy="640080"/>
+          </a:xfrm>
+          <a:prstGeom prst="roundRect">
+            <a:avLst>
+              <a:gd name="adj" fmla="val 5000"/>
+            </a:avLst>
+          </a:prstGeom>
+          <a:solidFill>
+            <a:srgbClr val="1A1A1A"/>
+          </a:solidFill>
+          <a:ln>
+            <a:noFill/>
+          </a:ln>
+        </p:spPr>
+        <p:style>
+          <a:lnRef idx="1">
+            <a:schemeClr val="accent1"/>
+          </a:lnRef>
+          <a:fillRef idx="3">
+            <a:schemeClr val="accent1"/>
+          </a:fillRef>
+          <a:effectRef idx="2">
+            <a:schemeClr val="accent1"/>
+          </a:effectRef>
+          <a:fontRef idx="minor">
+            <a:schemeClr val="lt1"/>
+          </a:fontRef>
+        </p:style>
+        <p:txBody>
+          <a:bodyPr rtlCol="0" anchor="ctr" wrap="square"/>
+          <a:lstStyle/>
+          <a:p>
+            <a:pPr algn="ctr">
+              <a:spcBef>
+                <a:spcPts val="0"/>
+              </a:spcBef>
+              <a:spcAft>
+                <a:spcPts val="0"/>
+              </a:spcAft>
+              <a:defRPr sz="900" b="0">
+                <a:solidFill>
+                  <a:srgbClr val="FFFFFF"/>
+                </a:solidFill>
+                <a:latin typeface="Meiryo"/>
+              </a:defRPr>
+            </a:pPr>
+            <a:r>
+              <a:t>製作動画をTikTok投稿</a:t>
+            </a:r>
+            <a:br/>
+            <a:r>
+              <a:t>サステナブル×おしゃれ</a:t>
+            </a:r>
+          </a:p>
+        </p:txBody>
+      </p:sp>
+      <p:sp>
+        <p:nvSpPr>
+          <p:cNvPr id="24" name="Right Arrow 23"/>
+          <p:cNvSpPr/>
+          <p:nvPr/>
+        </p:nvSpPr>
+        <p:spPr>
+          <a:xfrm>
+            <a:off x="7589520" y="5532120"/>
+            <a:ext cx="365760" cy="228600"/>
+          </a:xfrm>
+          <a:prstGeom prst="rightArrow">
+            <a:avLst/>
+          </a:prstGeom>
+          <a:solidFill>
+            <a:srgbClr val="3A7D44"/>
+          </a:solidFill>
+          <a:ln>
+            <a:noFill/>
+          </a:ln>
+        </p:spPr>
+        <p:style>
+          <a:lnRef idx="1">
+            <a:schemeClr val="accent1"/>
+          </a:lnRef>
+          <a:fillRef idx="3">
+            <a:schemeClr val="accent1"/>
+          </a:fillRef>
+          <a:effectRef idx="2">
+            <a:schemeClr val="accent1"/>
+          </a:effectRef>
+          <a:fontRef idx="minor">
+            <a:schemeClr val="lt1"/>
+          </a:fontRef>
+        </p:style>
+        <p:txBody>
+          <a:bodyPr rtlCol="0" anchor="ctr"/>
+          <a:lstStyle/>
+          <a:p>
+            <a:pPr algn="ctr"/>
+          </a:p>
+        </p:txBody>
+      </p:sp>
+      <p:sp>
+        <p:nvSpPr>
+          <p:cNvPr id="25" name="Rounded Rectangle 24"/>
+          <p:cNvSpPr/>
+          <p:nvPr/>
+        </p:nvSpPr>
+        <p:spPr>
+          <a:xfrm>
+            <a:off x="8046720" y="5212080"/>
+            <a:ext cx="1828800" cy="822960"/>
           </a:xfrm>
           <a:prstGeom prst="roundRect">
             <a:avLst>
@@ -8937,98 +9265,37 @@
               </a:spcAft>
               <a:defRPr sz="1000" b="0">
                 <a:solidFill>
-                  <a:srgbClr val="1A1A1A"/>
-                </a:solidFill>
-                <a:latin typeface="Meiryo"/>
-              </a:defRPr>
-            </a:pPr>
-            <a:r>
-              <a:t>TikTok動画</a:t>
+                  <a:srgbClr val="2E6B38"/>
+                </a:solidFill>
+                <a:latin typeface="Meiryo"/>
+              </a:defRPr>
+            </a:pPr>
+            <a:r>
+              <a:t>新規認知</a:t>
             </a:r>
             <a:br/>
             <a:r>
-              <a:t>で認知拡大</a:t>
-            </a:r>
-          </a:p>
-        </p:txBody>
-      </p:sp>
-      <p:sp>
-        <p:nvSpPr>
-          <p:cNvPr id="20" name="Rounded Rectangle 19"/>
+              <a:t>→ 小分け購入</a:t>
+            </a:r>
+            <a:br/>
+            <a:r>
+              <a:t>→ ループ</a:t>
+            </a:r>
+          </a:p>
+        </p:txBody>
+      </p:sp>
+      <p:sp>
+        <p:nvSpPr>
+          <p:cNvPr id="26" name="Down Arrow 25"/>
           <p:cNvSpPr/>
           <p:nvPr/>
         </p:nvSpPr>
         <p:spPr>
           <a:xfrm>
-            <a:off x="7772400" y="5212080"/>
-            <a:ext cx="1828800" cy="731520"/>
-          </a:xfrm>
-          <a:prstGeom prst="roundRect">
-            <a:avLst>
-              <a:gd name="adj" fmla="val 5000"/>
-            </a:avLst>
-          </a:prstGeom>
-          <a:solidFill>
-            <a:srgbClr val="E8F5E9"/>
-          </a:solidFill>
-          <a:ln>
-            <a:noFill/>
-          </a:ln>
-        </p:spPr>
-        <p:style>
-          <a:lnRef idx="1">
-            <a:schemeClr val="accent1"/>
-          </a:lnRef>
-          <a:fillRef idx="3">
-            <a:schemeClr val="accent1"/>
-          </a:fillRef>
-          <a:effectRef idx="2">
-            <a:schemeClr val="accent1"/>
-          </a:effectRef>
-          <a:fontRef idx="minor">
-            <a:schemeClr val="lt1"/>
-          </a:fontRef>
-        </p:style>
-        <p:txBody>
-          <a:bodyPr rtlCol="0" anchor="ctr" wrap="square"/>
-          <a:lstStyle/>
-          <a:p>
-            <a:pPr algn="ctr">
-              <a:spcBef>
-                <a:spcPts val="0"/>
-              </a:spcBef>
-              <a:spcAft>
-                <a:spcPts val="0"/>
-              </a:spcAft>
-              <a:defRPr sz="1000" b="0">
-                <a:solidFill>
-                  <a:srgbClr val="1A1A1A"/>
-                </a:solidFill>
-                <a:latin typeface="Meiryo"/>
-              </a:defRPr>
-            </a:pPr>
-            <a:r>
-              <a:t>新規購入者</a:t>
-            </a:r>
-            <a:br/>
-            <a:r>
-              <a:t>→ ループ</a:t>
-            </a:r>
-          </a:p>
-        </p:txBody>
-      </p:sp>
-      <p:sp>
-        <p:nvSpPr>
-          <p:cNvPr id="21" name="Right Arrow 20"/>
-          <p:cNvSpPr/>
-          <p:nvPr/>
-        </p:nvSpPr>
-        <p:spPr>
-          <a:xfrm>
-            <a:off x="2331720" y="5440680"/>
-            <a:ext cx="365760" cy="228600"/>
-          </a:xfrm>
-          <a:prstGeom prst="rightArrow">
+            <a:off x="8961120" y="4480560"/>
+            <a:ext cx="274320" cy="274320"/>
+          </a:xfrm>
+          <a:prstGeom prst="downArrow">
             <a:avLst/>
           </a:prstGeom>
           <a:solidFill>
@@ -9062,93 +9329,7 @@
       </p:sp>
       <p:sp>
         <p:nvSpPr>
-          <p:cNvPr id="22" name="Right Arrow 21"/>
-          <p:cNvSpPr/>
-          <p:nvPr/>
-        </p:nvSpPr>
-        <p:spPr>
-          <a:xfrm>
-            <a:off x="4663440" y="5440680"/>
-            <a:ext cx="365760" cy="228600"/>
-          </a:xfrm>
-          <a:prstGeom prst="rightArrow">
-            <a:avLst/>
-          </a:prstGeom>
-          <a:solidFill>
-            <a:srgbClr val="3A7D44"/>
-          </a:solidFill>
-          <a:ln>
-            <a:noFill/>
-          </a:ln>
-        </p:spPr>
-        <p:style>
-          <a:lnRef idx="1">
-            <a:schemeClr val="accent1"/>
-          </a:lnRef>
-          <a:fillRef idx="3">
-            <a:schemeClr val="accent1"/>
-          </a:fillRef>
-          <a:effectRef idx="2">
-            <a:schemeClr val="accent1"/>
-          </a:effectRef>
-          <a:fontRef idx="minor">
-            <a:schemeClr val="lt1"/>
-          </a:fontRef>
-        </p:style>
-        <p:txBody>
-          <a:bodyPr rtlCol="0" anchor="ctr"/>
-          <a:lstStyle/>
-          <a:p>
-            <a:pPr algn="ctr"/>
-          </a:p>
-        </p:txBody>
-      </p:sp>
-      <p:sp>
-        <p:nvSpPr>
-          <p:cNvPr id="23" name="Right Arrow 22"/>
-          <p:cNvSpPr/>
-          <p:nvPr/>
-        </p:nvSpPr>
-        <p:spPr>
-          <a:xfrm>
-            <a:off x="7178040" y="5440680"/>
-            <a:ext cx="365760" cy="228600"/>
-          </a:xfrm>
-          <a:prstGeom prst="rightArrow">
-            <a:avLst/>
-          </a:prstGeom>
-          <a:solidFill>
-            <a:srgbClr val="3A7D44"/>
-          </a:solidFill>
-          <a:ln>
-            <a:noFill/>
-          </a:ln>
-        </p:spPr>
-        <p:style>
-          <a:lnRef idx="1">
-            <a:schemeClr val="accent1"/>
-          </a:lnRef>
-          <a:fillRef idx="3">
-            <a:schemeClr val="accent1"/>
-          </a:fillRef>
-          <a:effectRef idx="2">
-            <a:schemeClr val="accent1"/>
-          </a:effectRef>
-          <a:fontRef idx="minor">
-            <a:schemeClr val="lt1"/>
-          </a:fontRef>
-        </p:style>
-        <p:txBody>
-          <a:bodyPr rtlCol="0" anchor="ctr"/>
-          <a:lstStyle/>
-          <a:p>
-            <a:pPr algn="ctr"/>
-          </a:p>
-        </p:txBody>
-      </p:sp>
-      <p:sp>
-        <p:nvSpPr>
-          <p:cNvPr id="24" name="TextBox 23"/>
+          <p:cNvPr id="27" name="TextBox 26"/>
           <p:cNvSpPr txBox="1"/>
           <p:nvPr/>
         </p:nvSpPr>
@@ -9190,7 +9371,7 @@
       </p:sp>
       <p:sp>
         <p:nvSpPr>
-          <p:cNvPr id="25" name="TextBox 24"/>
+          <p:cNvPr id="28" name="TextBox 27"/>
           <p:cNvSpPr txBox="1"/>
           <p:nvPr/>
         </p:nvSpPr>

--- a/COLLEGRANCE_事業全体像.pptx
+++ b/COLLEGRANCE_事業全体像.pptx
@@ -11527,7 +11527,183 @@
       </p:sp>
       <p:sp>
         <p:nvSpPr>
-          <p:cNvPr id="6" name="Right Arrow 5"/>
+          <p:cNvPr id="6" name="Rounded Rectangle 5"/>
+          <p:cNvSpPr/>
+          <p:nvPr/>
+        </p:nvSpPr>
+        <p:spPr>
+          <a:xfrm>
+            <a:off x="457200" y="2788920"/>
+            <a:ext cx="1005840" cy="594360"/>
+          </a:xfrm>
+          <a:prstGeom prst="roundRect">
+            <a:avLst/>
+          </a:prstGeom>
+          <a:noFill/>
+          <a:ln w="12700">
+            <a:solidFill>
+              <a:srgbClr val="666666"/>
+            </a:solidFill>
+            <a:prstDash val="sysDash"/>
+          </a:ln>
+        </p:spPr>
+        <p:style>
+          <a:lnRef idx="1">
+            <a:schemeClr val="accent1"/>
+          </a:lnRef>
+          <a:fillRef idx="3">
+            <a:schemeClr val="accent1"/>
+          </a:fillRef>
+          <a:effectRef idx="2">
+            <a:schemeClr val="accent1"/>
+          </a:effectRef>
+          <a:fontRef idx="minor">
+            <a:schemeClr val="lt1"/>
+          </a:fontRef>
+        </p:style>
+        <p:txBody>
+          <a:bodyPr rtlCol="0" anchor="ctr" wrap="square"/>
+          <a:lstStyle/>
+          <a:p>
+            <a:pPr algn="ctr">
+              <a:defRPr sz="900" b="1">
+                <a:solidFill>
+                  <a:srgbClr val="666666"/>
+                </a:solidFill>
+                <a:latin typeface="Meiryo"/>
+              </a:defRPr>
+            </a:pPr>
+            <a:r>
+              <a:t>Instagram</a:t>
+            </a:r>
+          </a:p>
+          <a:p>
+            <a:pPr algn="ctr">
+              <a:defRPr sz="700">
+                <a:solidFill>
+                  <a:srgbClr val="999999"/>
+                </a:solidFill>
+                <a:latin typeface="Meiryo"/>
+              </a:defRPr>
+            </a:pPr>
+            <a:r>
+              <a:t>世界観構築→AI診断誘導</a:t>
+            </a:r>
+          </a:p>
+        </p:txBody>
+      </p:sp>
+      <p:sp>
+        <p:nvSpPr>
+          <p:cNvPr id="7" name="Rounded Rectangle 6"/>
+          <p:cNvSpPr/>
+          <p:nvPr/>
+        </p:nvSpPr>
+        <p:spPr>
+          <a:xfrm>
+            <a:off x="1508760" y="2788920"/>
+            <a:ext cx="1005840" cy="594360"/>
+          </a:xfrm>
+          <a:prstGeom prst="roundRect">
+            <a:avLst/>
+          </a:prstGeom>
+          <a:noFill/>
+          <a:ln w="12700">
+            <a:solidFill>
+              <a:srgbClr val="666666"/>
+            </a:solidFill>
+            <a:prstDash val="sysDash"/>
+          </a:ln>
+        </p:spPr>
+        <p:style>
+          <a:lnRef idx="1">
+            <a:schemeClr val="accent1"/>
+          </a:lnRef>
+          <a:fillRef idx="3">
+            <a:schemeClr val="accent1"/>
+          </a:fillRef>
+          <a:effectRef idx="2">
+            <a:schemeClr val="accent1"/>
+          </a:effectRef>
+          <a:fontRef idx="minor">
+            <a:schemeClr val="lt1"/>
+          </a:fontRef>
+        </p:style>
+        <p:txBody>
+          <a:bodyPr rtlCol="0" anchor="ctr" wrap="square"/>
+          <a:lstStyle/>
+          <a:p>
+            <a:pPr algn="ctr">
+              <a:defRPr sz="900" b="1">
+                <a:solidFill>
+                  <a:srgbClr val="666666"/>
+                </a:solidFill>
+                <a:latin typeface="Meiryo"/>
+              </a:defRPr>
+            </a:pPr>
+            <a:r>
+              <a:t>Threads</a:t>
+            </a:r>
+          </a:p>
+          <a:p>
+            <a:pPr algn="ctr">
+              <a:defRPr sz="700">
+                <a:solidFill>
+                  <a:srgbClr val="999999"/>
+                </a:solidFill>
+                <a:latin typeface="Meiryo"/>
+              </a:defRPr>
+            </a:pPr>
+            <a:r>
+              <a:t>中の人投稿→認知拡大</a:t>
+            </a:r>
+          </a:p>
+        </p:txBody>
+      </p:sp>
+      <p:sp>
+        <p:nvSpPr>
+          <p:cNvPr id="8" name="TextBox 7"/>
+          <p:cNvSpPr txBox="1"/>
+          <p:nvPr/>
+        </p:nvSpPr>
+        <p:spPr>
+          <a:xfrm>
+            <a:off x="457200" y="3410712"/>
+            <a:ext cx="2103120" cy="228600"/>
+          </a:xfrm>
+          <a:prstGeom prst="rect">
+            <a:avLst/>
+          </a:prstGeom>
+          <a:noFill/>
+        </p:spPr>
+        <p:txBody>
+          <a:bodyPr wrap="square">
+            <a:spAutoFit/>
+          </a:bodyPr>
+          <a:lstStyle/>
+          <a:p>
+            <a:pPr algn="l">
+              <a:lnSpc>
+                <a:spcPts val="840"/>
+              </a:lnSpc>
+              <a:spcAft>
+                <a:spcPts val="0"/>
+              </a:spcAft>
+              <a:defRPr sz="700" b="0">
+                <a:solidFill>
+                  <a:srgbClr val="999999"/>
+                </a:solidFill>
+                <a:latin typeface="Meiryo"/>
+              </a:defRPr>
+            </a:pPr>
+            <a:r>
+              <a:t>※ 今後追加予定（集客チャネル）</a:t>
+            </a:r>
+          </a:p>
+        </p:txBody>
+      </p:sp>
+      <p:sp>
+        <p:nvSpPr>
+          <p:cNvPr id="9" name="Right Arrow 8"/>
           <p:cNvSpPr/>
           <p:nvPr/>
         </p:nvSpPr>
@@ -11570,7 +11746,7 @@
       </p:sp>
       <p:sp>
         <p:nvSpPr>
-          <p:cNvPr id="7" name="Rounded Rectangle 6"/>
+          <p:cNvPr id="10" name="Rounded Rectangle 9"/>
           <p:cNvSpPr/>
           <p:nvPr/>
         </p:nvSpPr>
@@ -11657,7 +11833,7 @@
       </p:sp>
       <p:sp>
         <p:nvSpPr>
-          <p:cNvPr id="8" name="Right Arrow 7"/>
+          <p:cNvPr id="11" name="Right Arrow 10"/>
           <p:cNvSpPr/>
           <p:nvPr/>
         </p:nvSpPr>
@@ -11700,7 +11876,7 @@
       </p:sp>
       <p:sp>
         <p:nvSpPr>
-          <p:cNvPr id="9" name="Rounded Rectangle 8"/>
+          <p:cNvPr id="12" name="Rounded Rectangle 11"/>
           <p:cNvSpPr/>
           <p:nvPr/>
         </p:nvSpPr>
@@ -11787,7 +11963,7 @@
       </p:sp>
       <p:sp>
         <p:nvSpPr>
-          <p:cNvPr id="10" name="Right Arrow 9"/>
+          <p:cNvPr id="13" name="Right Arrow 12"/>
           <p:cNvSpPr/>
           <p:nvPr/>
         </p:nvSpPr>
@@ -11830,7 +12006,7 @@
       </p:sp>
       <p:sp>
         <p:nvSpPr>
-          <p:cNvPr id="11" name="Rounded Rectangle 10"/>
+          <p:cNvPr id="14" name="Rounded Rectangle 13"/>
           <p:cNvSpPr/>
           <p:nvPr/>
         </p:nvSpPr>
@@ -11917,7 +12093,7 @@
       </p:sp>
       <p:sp>
         <p:nvSpPr>
-          <p:cNvPr id="12" name="Down Arrow 11"/>
+          <p:cNvPr id="15" name="Down Arrow 14"/>
           <p:cNvSpPr/>
           <p:nvPr/>
         </p:nvSpPr>
@@ -11960,7 +12136,7 @@
       </p:sp>
       <p:sp>
         <p:nvSpPr>
-          <p:cNvPr id="13" name="Down Arrow 12"/>
+          <p:cNvPr id="16" name="Down Arrow 15"/>
           <p:cNvSpPr/>
           <p:nvPr/>
         </p:nvSpPr>
@@ -12003,7 +12179,7 @@
       </p:sp>
       <p:sp>
         <p:nvSpPr>
-          <p:cNvPr id="14" name="Rounded Rectangle 13"/>
+          <p:cNvPr id="17" name="Rounded Rectangle 16"/>
           <p:cNvSpPr/>
           <p:nvPr/>
         </p:nvSpPr>
@@ -12077,7 +12253,7 @@
       </p:sp>
       <p:sp>
         <p:nvSpPr>
-          <p:cNvPr id="15" name="Rounded Rectangle 14"/>
+          <p:cNvPr id="18" name="Rounded Rectangle 17"/>
           <p:cNvSpPr/>
           <p:nvPr/>
         </p:nvSpPr>
@@ -12151,7 +12327,7 @@
       </p:sp>
       <p:sp>
         <p:nvSpPr>
-          <p:cNvPr id="16" name="TextBox 15"/>
+          <p:cNvPr id="19" name="TextBox 18"/>
           <p:cNvSpPr txBox="1"/>
           <p:nvPr/>
         </p:nvSpPr>
@@ -12193,7 +12369,7 @@
       </p:sp>
       <p:sp>
         <p:nvSpPr>
-          <p:cNvPr id="17" name="Rounded Rectangle 16"/>
+          <p:cNvPr id="20" name="Rounded Rectangle 19"/>
           <p:cNvSpPr/>
           <p:nvPr/>
         </p:nvSpPr>
@@ -12258,7 +12434,7 @@
       </p:sp>
       <p:sp>
         <p:nvSpPr>
-          <p:cNvPr id="18" name="Rounded Rectangle 17"/>
+          <p:cNvPr id="21" name="Rounded Rectangle 20"/>
           <p:cNvSpPr/>
           <p:nvPr/>
         </p:nvSpPr>
@@ -12323,7 +12499,7 @@
       </p:sp>
       <p:sp>
         <p:nvSpPr>
-          <p:cNvPr id="19" name="Right Arrow 18"/>
+          <p:cNvPr id="22" name="Right Arrow 21"/>
           <p:cNvSpPr/>
           <p:nvPr/>
         </p:nvSpPr>
@@ -12366,7 +12542,7 @@
       </p:sp>
       <p:sp>
         <p:nvSpPr>
-          <p:cNvPr id="20" name="Rounded Rectangle 19"/>
+          <p:cNvPr id="23" name="Rounded Rectangle 22"/>
           <p:cNvSpPr/>
           <p:nvPr/>
         </p:nvSpPr>
@@ -12431,7 +12607,7 @@
       </p:sp>
       <p:sp>
         <p:nvSpPr>
-          <p:cNvPr id="21" name="Right Arrow 20"/>
+          <p:cNvPr id="24" name="Right Arrow 23"/>
           <p:cNvSpPr/>
           <p:nvPr/>
         </p:nvSpPr>
@@ -12474,7 +12650,7 @@
       </p:sp>
       <p:sp>
         <p:nvSpPr>
-          <p:cNvPr id="22" name="Rounded Rectangle 21"/>
+          <p:cNvPr id="25" name="Rounded Rectangle 24"/>
           <p:cNvSpPr/>
           <p:nvPr/>
         </p:nvSpPr>
@@ -12539,7 +12715,7 @@
       </p:sp>
       <p:sp>
         <p:nvSpPr>
-          <p:cNvPr id="23" name="Rounded Rectangle 22"/>
+          <p:cNvPr id="26" name="Rounded Rectangle 25"/>
           <p:cNvSpPr/>
           <p:nvPr/>
         </p:nvSpPr>
@@ -12604,7 +12780,7 @@
       </p:sp>
       <p:sp>
         <p:nvSpPr>
-          <p:cNvPr id="24" name="Right Arrow 23"/>
+          <p:cNvPr id="27" name="Right Arrow 26"/>
           <p:cNvSpPr/>
           <p:nvPr/>
         </p:nvSpPr>
@@ -12647,7 +12823,7 @@
       </p:sp>
       <p:sp>
         <p:nvSpPr>
-          <p:cNvPr id="25" name="Rounded Rectangle 24"/>
+          <p:cNvPr id="28" name="Rounded Rectangle 27"/>
           <p:cNvSpPr/>
           <p:nvPr/>
         </p:nvSpPr>
@@ -12716,7 +12892,7 @@
       </p:sp>
       <p:sp>
         <p:nvSpPr>
-          <p:cNvPr id="26" name="Down Arrow 25"/>
+          <p:cNvPr id="29" name="Down Arrow 28"/>
           <p:cNvSpPr/>
           <p:nvPr/>
         </p:nvSpPr>
@@ -12759,7 +12935,7 @@
       </p:sp>
       <p:sp>
         <p:nvSpPr>
-          <p:cNvPr id="27" name="TextBox 26"/>
+          <p:cNvPr id="30" name="TextBox 29"/>
           <p:cNvSpPr txBox="1"/>
           <p:nvPr/>
         </p:nvSpPr>
@@ -12801,7 +12977,7 @@
       </p:sp>
       <p:sp>
         <p:nvSpPr>
-          <p:cNvPr id="28" name="TextBox 27"/>
+          <p:cNvPr id="31" name="TextBox 30"/>
           <p:cNvSpPr txBox="1"/>
           <p:nvPr/>
         </p:nvSpPr>
